--- a/entregables/Presentacion_Proyecto_Calculo_II.pptx
+++ b/entregables/Presentacion_Proyecto_Calculo_II.pptx
@@ -4252,8 +4252,8 @@
         </p:nvSpPr>
         <p:spPr>
           <a:xfrm>
-            <a:off x="640080" y="5120640"/>
-            <a:ext cx="10515600" cy="822960"/>
+            <a:off x="640080" y="4572000"/>
+            <a:ext cx="10515600" cy="1828800"/>
           </a:xfrm>
           <a:prstGeom prst="rect">
             <a:avLst/>
@@ -4269,28 +4269,68 @@
               <a:buNone/>
             </a:pPr>
             <a:r>
-              <a:rPr lang="en-US" sz="1600" dirty="0">
+              <a:rPr lang="es-GT" sz="1500" b="1" dirty="0">
                 <a:solidFill>
                   <a:srgbClr val="CBD5E1"/>
                 </a:solidFill>
               </a:rPr>
-              <a:t>Integrantes: [Integrante 1] · [Integrante 2] · [Integrante 3]</a:t>
-            </a:r>
-            <a:endParaRPr lang="en-US" sz="1600" dirty="0"/>
+              <a:t>Integrantes:</a:t>
+            </a:r>
           </a:p>
           <a:p>
             <a:pPr indent="0" marL="0">
               <a:buNone/>
             </a:pPr>
             <a:r>
-              <a:rPr lang="en-US" sz="1600" dirty="0">
+              <a:rPr lang="es-GT" sz="1500" dirty="0">
                 <a:solidFill>
                   <a:srgbClr val="CBD5E1"/>
                 </a:solidFill>
               </a:rPr>
-              <a:t>Docente: Ing. José Alfredo González · Sección [ ] · 25 de octubre de 2026</a:t>
-            </a:r>
-            <a:endParaRPr lang="en-US" sz="1600" dirty="0"/>
+              <a:t>Javier Alejandro Echeverría Figueroa · Carné 3490-25-23600</a:t>
+            </a:r>
+          </a:p>
+          <a:p>
+            <a:pPr indent="0" marL="0">
+              <a:buNone/>
+            </a:pPr>
+            <a:r>
+              <a:rPr lang="es-GT" sz="1500" dirty="0">
+                <a:solidFill>
+                  <a:srgbClr val="CBD5E1"/>
+                </a:solidFill>
+              </a:rPr>
+              <a:t>Fernando Isaac Garcia Baldetti · Carné 3490-25-20014</a:t>
+            </a:r>
+          </a:p>
+          <a:p>
+            <a:pPr indent="0" marL="0">
+              <a:buNone/>
+            </a:pPr>
+            <a:r>
+              <a:rPr lang="es-GT" sz="1500" dirty="0">
+                <a:solidFill>
+                  <a:srgbClr val="CBD5E1"/>
+                </a:solidFill>
+              </a:rPr>
+              <a:t>Edison Vinicio Alvarez Pérez · Carné 3490-25-10745</a:t>
+            </a:r>
+          </a:p>
+          <a:p>
+            <a:pPr indent="0" marL="0">
+              <a:spcBef>
+                <a:spcPts val="900"/>
+              </a:spcBef>
+              <a:buNone/>
+            </a:pPr>
+            <a:r>
+              <a:rPr lang="es-GT" sz="1500" dirty="0">
+                <a:solidFill>
+                  <a:srgbClr val="CBD5E1"/>
+                </a:solidFill>
+              </a:rPr>
+              <a:t>Docente: Ing. José Alfredo González · Sección B · 25 de octubre de 2026</a:t>
+            </a:r>
           </a:p>
         </p:txBody>
       </p:sp>
